--- a/outputs/ophthalmology-batch-20261011/pediatric/slides_editable.pptx
+++ b/outputs/ophthalmology-batch-20261011/pediatric/slides_editable.pptx
@@ -845,7 +845,7 @@
           <a:lstStyle/>
           <a:p>
             <a:r>
-              <a:t>pediatric-09 心率降幅&gt;50%：立即移除斜视钩并暂停；未恢复增强局麻，再无效静推阿托品0.1~0.3 mg，心率正常后继续；由麻醉/心内医师处理。</a:t>
+              <a:t>pediatric-09 心率降幅&gt;50%：立即移除斜视钩并暂停；未恢复增强局麻，再无效静推阿托品0.1~0.3 mg，心率恢复正常后继续；由麻醉/心内医师处理。</a:t>
             </a:r>
           </a:p>
           <a:p>
@@ -1069,7 +1069,7 @@
           <a:lstStyle/>
           <a:p>
             <a:r>
-              <a:t>pediatric-14 外斜术后过矫：伴复视可1~4周交替遮盖；4周仍内斜 → 麻痹验光、远视足矫/必要棱镜，高AC/A双光。连续内斜&gt;6月等情况考虑二次手术/肉毒毒素。</a:t>
+              <a:t>pediatric-14 外斜术后过矫：伴复视可1~4周交替遮盖；4周仍内斜 → 睫状肌麻痹验光、远视足矫/必要棱镜，高AC/A双光。连续内斜&gt;6月等情况考虑二次手术/肉毒毒素。</a:t>
             </a:r>
           </a:p>
           <a:p>
@@ -1085,7 +1085,7 @@
           <a:p/>
           <a:p>
             <a:r>
-              <a:t>pediatric-15 欠矫处理：外斜欠矫足矫近视/屈光参差、视功能训练；控制好观察，控制差可术后6周二次手术。内斜欠矫麻痹验光、远视足矫/双光及治弱视。</a:t>
+              <a:t>pediatric-15 欠矫处理：外斜欠矫足矫近视/屈光参差、视功能训练；控制好观察，控制差可术后6周二次手术。内斜欠矫睫状肌麻痹验光、远视足矫/双光及治弱视。</a:t>
             </a:r>
           </a:p>
           <a:p>
@@ -1181,7 +1181,7 @@
           <a:lstStyle/>
           <a:p>
             <a:r>
-              <a:t>pediatric-18 肌肉滑脱识别：术后眼位异常、运动受限、扫视减慢应疑滑脱；MRI/回弹试验辅助，术探透见试验阳性确诊；二次寻找实体肌并重固定。</a:t>
+              <a:t>pediatric-18 肌肉滑脱识别：术后眼位异常、运动受限、扫视减慢应疑滑脱；MRI/回弹试验辅助，术中探查透见试验阳性可确诊；二次寻找实体肌并重固定。</a:t>
             </a:r>
           </a:p>
           <a:p>
@@ -1405,7 +1405,7 @@
           <a:p/>
           <a:p>
             <a:r>
-              <a:t>pediatric-09 心率降幅&gt;50%：立即移除斜视钩并暂停；未恢复增强局麻，再无效静推阿托品0.1~0.3 mg，心率正常后继续；由麻醉/心内医师处理。</a:t>
+              <a:t>pediatric-09 心率降幅&gt;50%：立即移除斜视钩并暂停；未恢复增强局麻，再无效静推阿托品0.1~0.3 mg，心率恢复正常后继续；由麻醉/心内医师处理。</a:t>
             </a:r>
           </a:p>
           <a:p>
@@ -1485,7 +1485,7 @@
           <a:p/>
           <a:p>
             <a:r>
-              <a:t>pediatric-14 外斜术后过矫：伴复视可1~4周交替遮盖；4周仍内斜 → 麻痹验光、远视足矫/必要棱镜，高AC/A双光。连续内斜&gt;6月等情况考虑二次手术/肉毒毒素。</a:t>
+              <a:t>pediatric-14 外斜术后过矫：伴复视可1~4周交替遮盖；4周仍内斜 → 睫状肌麻痹验光、远视足矫/必要棱镜，高AC/A双光。连续内斜&gt;6月等情况考虑二次手术/肉毒毒素。</a:t>
             </a:r>
           </a:p>
           <a:p>
@@ -1501,7 +1501,7 @@
           <a:p/>
           <a:p>
             <a:r>
-              <a:t>pediatric-15 欠矫处理：外斜欠矫足矫近视/屈光参差、视功能训练；控制好观察，控制差可术后6周二次手术。内斜欠矫麻痹验光、远视足矫/双光及治弱视。</a:t>
+              <a:t>pediatric-15 欠矫处理：外斜欠矫足矫近视/屈光参差、视功能训练；控制好观察，控制差可术后6周二次手术。内斜欠矫睫状肌麻痹验光、远视足矫/双光及治弱视。</a:t>
             </a:r>
           </a:p>
           <a:p>
@@ -1533,7 +1533,7 @@
           <a:p/>
           <a:p>
             <a:r>
-              <a:t>pediatric-18 肌肉滑脱识别：术后眼位异常、运动受限、扫视减慢应疑滑脱；MRI/回弹试验辅助，术探透见试验阳性确诊；二次寻找实体肌并重固定。</a:t>
+              <a:t>pediatric-18 肌肉滑脱识别：术后眼位异常、运动受限、扫视减慢应疑滑脱；MRI/回弹试验辅助，术中探查透见试验阳性可确诊；二次寻找实体肌并重固定。</a:t>
             </a:r>
           </a:p>
           <a:p>
@@ -7878,7 +7878,7 @@
       </p:sp>
       <p:sp>
         <p:nvSpPr>
-          <p:cNvPr id="9" name="立即移除斜视钩并暂停；未恢复增强局麻，再无效静推阿托品0.1~0.3 mg，心率正常后继续；由麻醉/"/>
+          <p:cNvPr id="9" name="立即移除斜视钩并暂停；未恢复增强局麻，再无效静推阿托品0.1~0.3 mg，心率恢复正常后继续；由麻"/>
           <p:cNvSpPr txBox="1"/>
           <p:nvPr/>
         </p:nvSpPr>
@@ -7918,7 +7918,7 @@
                 <a:ea typeface="Microsoft YaHei"/>
                 <a:cs typeface="Microsoft YaHei"/>
               </a:rPr>
-              <a:t>立即移除斜视钩并暂停；未恢复增强局麻，再无效静推阿托品0.1~0.3 mg，心率正常后继续；由麻醉/</a:t>
+              <a:t>立即移除斜视钩并暂停；未恢复增强局麻，再无效静推阿托品0.1~0.3 mg，心率恢复正常后继续；由</a:t>
             </a:r>
           </a:p>
           <a:p>
@@ -7942,7 +7942,7 @@
                 <a:ea typeface="Microsoft YaHei"/>
                 <a:cs typeface="Microsoft YaHei"/>
               </a:rPr>
-              <a:t>心内医师处理。</a:t>
+              <a:t>麻醉/心内医师处理。</a:t>
             </a:r>
           </a:p>
         </p:txBody>
@@ -9910,7 +9910,7 @@
       </p:sp>
       <p:sp>
         <p:nvSpPr>
-          <p:cNvPr id="9" name="伴复视可1~4周交替遮盖；4周仍内斜 → 麻痹验光、远视足矫/必要棱镜，高AC/A双光。连续内斜&gt;6"/>
+          <p:cNvPr id="9" name="伴复视可1~4周交替遮盖；4周仍内斜 → 睫状肌麻痹验光、远视足矫/必要棱镜，高AC/A双光。连续内"/>
           <p:cNvSpPr txBox="1"/>
           <p:nvPr/>
         </p:nvSpPr>
@@ -9950,7 +9950,7 @@
                 <a:ea typeface="Microsoft YaHei"/>
                 <a:cs typeface="Microsoft YaHei"/>
               </a:rPr>
-              <a:t>伴复视可1~4周交替遮盖；4周仍内斜 → 麻痹验光、远视足矫/必要棱镜，高AC/A双光。连续内斜&gt;6月</a:t>
+              <a:t>伴复视可1~4周交替遮盖；4周仍内斜 → 睫状肌麻痹验光、远视足矫/必要棱镜，高AC/A双光。连续内</a:t>
             </a:r>
           </a:p>
           <a:p>
@@ -9974,7 +9974,7 @@
                 <a:ea typeface="Microsoft YaHei"/>
                 <a:cs typeface="Microsoft YaHei"/>
               </a:rPr>
-              <a:t>等情况考虑二次手术/肉毒毒素。</a:t>
+              <a:t>斜&gt;6月等情况考虑二次手术/肉毒毒素。</a:t>
             </a:r>
           </a:p>
         </p:txBody>
@@ -10163,7 +10163,7 @@
       </p:sp>
       <p:sp>
         <p:nvSpPr>
-          <p:cNvPr id="14" name="外斜欠矫足矫近视/屈光参差、视功能训练；控制好观察，控制差可术后6周二次手术。内斜欠矫麻痹验光、远视"/>
+          <p:cNvPr id="14" name="外斜欠矫足矫近视/屈光参差、视功能训练；控制好观察，控制差可术后6周二次手术。内斜欠矫睫状肌麻痹验光"/>
           <p:cNvSpPr txBox="1"/>
           <p:nvPr/>
         </p:nvSpPr>
@@ -10203,7 +10203,7 @@
                 <a:ea typeface="Microsoft YaHei"/>
                 <a:cs typeface="Microsoft YaHei"/>
               </a:rPr>
-              <a:t>外斜欠矫足矫近视/屈光参差、视功能训练；控制好观察，控制差可术后6周二次手术。内斜欠矫麻痹验</a:t>
+              <a:t>外斜欠矫足矫近视/屈光参差、视功能训练；控制好观察，控制差可术后6周二次手术。内斜欠矫睫状肌</a:t>
             </a:r>
           </a:p>
           <a:p>
@@ -10227,7 +10227,7 @@
                 <a:ea typeface="Microsoft YaHei"/>
                 <a:cs typeface="Microsoft YaHei"/>
               </a:rPr>
-              <a:t>光、远视足矫/双光及治弱视。</a:t>
+              <a:t>麻痹验光、远视足矫/双光及治弱视。</a:t>
             </a:r>
           </a:p>
         </p:txBody>
@@ -10926,7 +10926,7 @@
       </p:sp>
       <p:sp>
         <p:nvSpPr>
-          <p:cNvPr id="9" name="术后眼位异常、运动受限、扫视减慢应疑滑脱；MRI/回弹试验辅助，术探透见试验阳性确诊；二次寻找实体肌"/>
+          <p:cNvPr id="9" name="术后眼位异常、运动受限、扫视减慢应疑滑脱；MRI/回弹试验辅助，术中探查透见试验阳性可确诊；二次寻找"/>
           <p:cNvSpPr txBox="1"/>
           <p:nvPr/>
         </p:nvSpPr>
@@ -10966,7 +10966,7 @@
                 <a:ea typeface="Microsoft YaHei"/>
                 <a:cs typeface="Microsoft YaHei"/>
               </a:rPr>
-              <a:t>术后眼位异常、运动受限、扫视减慢应疑滑脱；MRI/回弹试验辅助，术探透见试验阳性确诊；二次寻</a:t>
+              <a:t>术后眼位异常、运动受限、扫视减慢应疑滑脱；MRI/回弹试验辅助，术中探查透见试验阳性可确诊；</a:t>
             </a:r>
           </a:p>
           <a:p>
@@ -10990,7 +10990,7 @@
                 <a:ea typeface="Microsoft YaHei"/>
                 <a:cs typeface="Microsoft YaHei"/>
               </a:rPr>
-              <a:t>找实体肌并重固定。</a:t>
+              <a:t>二次寻找实体肌并重固定。</a:t>
             </a:r>
           </a:p>
         </p:txBody>
@@ -12113,7 +12113,7 @@
       </p:sp>
       <p:sp>
         <p:nvSpPr>
-          <p:cNvPr id="17" name="心率降&lt;20%观察；20%~50%按血压/心率稳定分支；&gt;50%立即移钩暂停。"/>
+          <p:cNvPr id="17" name="心率较基线降幅&lt;20%观察；20%~50%按血压/心率稳定分支；&gt;50%立即移钩暂停。"/>
           <p:cNvSpPr txBox="1"/>
           <p:nvPr/>
         </p:nvSpPr>
@@ -12153,7 +12153,7 @@
                 <a:ea typeface="Microsoft YaHei"/>
                 <a:cs typeface="Microsoft YaHei"/>
               </a:rPr>
-              <a:t>心率降&lt;20%观察；20%~50%按血压/心率稳定分支；&gt;50%立即</a:t>
+              <a:t>心率较基线降幅&lt;20%观察；20%~50%按血压/心率稳定分支；</a:t>
             </a:r>
           </a:p>
           <a:p>
@@ -12177,7 +12177,7 @@
                 <a:ea typeface="Microsoft YaHei"/>
                 <a:cs typeface="Microsoft YaHei"/>
               </a:rPr>
-              <a:t>移钩暂停。</a:t>
+              <a:t>&gt;50%立即移钩暂停。</a:t>
             </a:r>
           </a:p>
         </p:txBody>
@@ -12851,7 +12851,7 @@
       </p:sp>
       <p:sp>
         <p:nvSpPr>
-          <p:cNvPr id="32" name="不双眼包眼；1周首测用药眼压；1天、1周、1/3/6月后每半年；过/欠矫按原文独立分支。"/>
+          <p:cNvPr id="32" name="不双眼包眼；1周首测用药眼压；1天、1周、第1、3、6个月后每半年；过/欠矫按原文独立分支。"/>
           <p:cNvSpPr txBox="1"/>
           <p:nvPr/>
         </p:nvSpPr>
@@ -12891,7 +12891,7 @@
                 <a:ea typeface="Microsoft YaHei"/>
                 <a:cs typeface="Microsoft YaHei"/>
               </a:rPr>
-              <a:t>不双眼包眼；1周首测用药眼压；1天、1周、1/3/6月后每半年；</a:t>
+              <a:t>不双眼包眼；1周首测用药眼压；1天、1周、第1、3、6个月后每</a:t>
             </a:r>
           </a:p>
           <a:p>
@@ -12915,7 +12915,7 @@
                 <a:ea typeface="Microsoft YaHei"/>
                 <a:cs typeface="Microsoft YaHei"/>
               </a:rPr>
-              <a:t>过/欠矫按原文独立分支。</a:t>
+              <a:t>半年；过/欠矫按原文独立分支。</a:t>
             </a:r>
           </a:p>
         </p:txBody>
